--- a/tpt/017-dmp2-music-for-visual-media/music-for-visual-media-intro-deck.pptx
+++ b/tpt/017-dmp2-music-for-visual-media/music-for-visual-media-intro-deck.pptx
@@ -1149,7 +1149,7 @@
           <a:lstStyle/>
           <a:p>
             <a:r>
-              <a:t>Close with what my teacher notes say this project builds: synchronization skills, emotional storytelling through music, and arrangement for narrative purposes. It is one of the most rewarding projects when students nail the sync. Remind them that music does not have to fill every second.</a:t>
+              <a:t>Close with what my teacher notes say this project builds: synchronization skills, emotional storytelling through music, and arrangement for narrative purposes. It is one of the most rewarding projects when students nail the sync. Remind them that music does not have to fill every second. Reflection: point students to the Reflection page. A reflection is a written or oral conversation about how they did on the project and what they would do differently next time; they choose to write it or to talk it through with you.</a:t>
             </a:r>
           </a:p>
         </p:txBody>
@@ -11628,6 +11628,120 @@
           </a:prstGeom>
         </p:spPr>
       </p:pic>
+      <p:sp>
+        <p:nvSpPr>
+          <p:cNvPr id="19" name="Rounded Rectangle 18"/>
+          <p:cNvSpPr/>
+          <p:nvPr/>
+        </p:nvSpPr>
+        <p:spPr>
+          <a:xfrm>
+            <a:off x="548640" y="5349240"/>
+            <a:ext cx="5852160" cy="960120"/>
+          </a:xfrm>
+          <a:prstGeom prst="roundRect">
+            <a:avLst/>
+          </a:prstGeom>
+          <a:solidFill>
+            <a:srgbClr val="8A3B12"/>
+          </a:solidFill>
+          <a:ln>
+            <a:noFill/>
+          </a:ln>
+          <a:effectLst/>
+        </p:spPr>
+        <p:style>
+          <a:lnRef idx="1">
+            <a:schemeClr val="accent1"/>
+          </a:lnRef>
+          <a:fillRef idx="3">
+            <a:schemeClr val="accent1"/>
+          </a:fillRef>
+          <a:effectRef idx="2">
+            <a:schemeClr val="accent1"/>
+          </a:effectRef>
+          <a:fontRef idx="minor">
+            <a:schemeClr val="lt1"/>
+          </a:fontRef>
+        </p:style>
+        <p:txBody>
+          <a:bodyPr rtlCol="0" anchor="ctr"/>
+          <a:lstStyle/>
+          <a:p>
+            <a:pPr algn="ctr"/>
+          </a:p>
+        </p:txBody>
+      </p:sp>
+      <p:sp>
+        <p:nvSpPr>
+          <p:cNvPr id="20" name="TextBox 19"/>
+          <p:cNvSpPr txBox="1"/>
+          <p:nvPr/>
+        </p:nvSpPr>
+        <p:spPr>
+          <a:xfrm>
+            <a:off x="731520" y="5394960"/>
+            <a:ext cx="5486400" cy="365760"/>
+          </a:xfrm>
+          <a:prstGeom prst="rect">
+            <a:avLst/>
+          </a:prstGeom>
+          <a:noFill/>
+        </p:spPr>
+        <p:txBody>
+          <a:bodyPr wrap="square" anchor="t" lIns="36576" rIns="36576" tIns="18288" bIns="18288">
+            <a:spAutoFit/>
+          </a:bodyPr>
+          <a:lstStyle/>
+          <a:p>
+            <a:pPr algn="l"/>
+            <a:r>
+              <a:rPr sz="2000" b="1">
+                <a:solidFill>
+                  <a:srgbClr val="FFFFFF"/>
+                </a:solidFill>
+                <a:latin typeface="Oswald"/>
+              </a:rPr>
+              <a:t>REFLECTION · PAGE 25</a:t>
+            </a:r>
+          </a:p>
+        </p:txBody>
+      </p:sp>
+      <p:sp>
+        <p:nvSpPr>
+          <p:cNvPr id="21" name="TextBox 20"/>
+          <p:cNvSpPr txBox="1"/>
+          <p:nvPr/>
+        </p:nvSpPr>
+        <p:spPr>
+          <a:xfrm>
+            <a:off x="731520" y="5760720"/>
+            <a:ext cx="5486400" cy="502920"/>
+          </a:xfrm>
+          <a:prstGeom prst="rect">
+            <a:avLst/>
+          </a:prstGeom>
+          <a:noFill/>
+        </p:spPr>
+        <p:txBody>
+          <a:bodyPr wrap="square" anchor="t" lIns="36576" rIns="36576" tIns="18288" bIns="18288">
+            <a:spAutoFit/>
+          </a:bodyPr>
+          <a:lstStyle/>
+          <a:p>
+            <a:pPr algn="l"/>
+            <a:r>
+              <a:rPr sz="1500" b="0">
+                <a:solidFill>
+                  <a:srgbClr val="FFFFFF"/>
+                </a:solidFill>
+                <a:latin typeface="Source Sans 3"/>
+              </a:rPr>
+              <a:t>Write it or talk it through: what went well, what was hard, what you would change.</a:t>
+            </a:r>
+          </a:p>
+        </p:txBody>
+      </p:sp>
     </p:spTree>
   </p:cSld>
   <p:clrMapOvr>
